--- a/courseware/202610_DSA_W06_Recursion_Divide_Sorting.pptx
+++ b/courseware/202610_DSA_W06_Recursion_Divide_Sorting.pptx
@@ -14895,7 +14895,7 @@
         </p:nvGraphicFramePr>
         <p:xfrm>
           <a:off x="566928" y="1298448"/>
-          <a:ext cx="11057836" cy="3515360"/>
+          <a:ext cx="11057837" cy="3515360"/>
         </p:xfrm>
         <a:graphic>
           <a:graphicData uri="http://schemas.openxmlformats.org/drawingml/2006/table">
@@ -14904,10 +14904,10 @@
                 <a:tableStyleId>{5C22544A-7EE6-4342-B048-85BDC9FD1C3A}</a:tableStyleId>
               </a:tblPr>
               <a:tblGrid>
-                <a:gridCol w="1806576"/>
-                <a:gridCol w="4367548"/>
-                <a:gridCol w="2243331"/>
-                <a:gridCol w="2640381"/>
+                <a:gridCol w="1668761"/>
+                <a:gridCol w="4034369"/>
+                <a:gridCol w="2915748"/>
+                <a:gridCol w="2438959"/>
               </a:tblGrid>
               <a:tr h="439420">
                 <a:tc>
@@ -15106,7 +15106,7 @@
                           <a:latin typeface="Segoe UI"/>
                           <a:ea typeface="微软雅黑"/>
                         </a:rPr>
-                        <a:t>汉诺塔</a:t>
+                        <a:t>汉诺塔问题</a:t>
                       </a:r>
                     </a:p>
                   </a:txBody>
@@ -15140,7 +15140,7 @@
                           <a:latin typeface="Segoe UI"/>
                           <a:ea typeface="微软雅黑"/>
                         </a:rPr>
-                        <a:t>课堂题</a:t>
+                        <a:t>LC 面试题 08.06</a:t>
                       </a:r>
                     </a:p>
                   </a:txBody>

--- a/courseware/202610_DSA_W06_Recursion_Divide_Sorting.pptx
+++ b/courseware/202610_DSA_W06_Recursion_Divide_Sorting.pptx
@@ -14895,7 +14895,7 @@
         </p:nvGraphicFramePr>
         <p:xfrm>
           <a:off x="566928" y="1298448"/>
-          <a:ext cx="11057837" cy="3515360"/>
+          <a:ext cx="11057836" cy="3515360"/>
         </p:xfrm>
         <a:graphic>
           <a:graphicData uri="http://schemas.openxmlformats.org/drawingml/2006/table">
@@ -14904,10 +14904,10 @@
                 <a:tableStyleId>{5C22544A-7EE6-4342-B048-85BDC9FD1C3A}</a:tableStyleId>
               </a:tblPr>
               <a:tblGrid>
-                <a:gridCol w="1668761"/>
-                <a:gridCol w="4034369"/>
-                <a:gridCol w="2915748"/>
-                <a:gridCol w="2438959"/>
+                <a:gridCol w="1806576"/>
+                <a:gridCol w="4367548"/>
+                <a:gridCol w="2243331"/>
+                <a:gridCol w="2640381"/>
               </a:tblGrid>
               <a:tr h="439420">
                 <a:tc>
@@ -15140,7 +15140,7 @@
                           <a:latin typeface="Segoe UI"/>
                           <a:ea typeface="微软雅黑"/>
                         </a:rPr>
-                        <a:t>LC 面试题 08.06</a:t>
+                        <a:t>OJ 04147</a:t>
                       </a:r>
                     </a:p>
                   </a:txBody>
